--- a/output/agentic-iac.pptx
+++ b/output/agentic-iac.pptx
@@ -921,7 +921,7 @@
         <p:spPr>
           <a:xfrm>
             <a:off x="457200" y="1005840"/>
-            <a:ext cx="8229600" cy="2351314"/>
+            <a:ext cx="6101188" cy="3657600"/>
           </a:xfrm>
           <a:prstGeom prst="rect">
             <a:avLst/>
